--- a/Section_03_Data_Modeling_Schema_Design_Validation/Lesson_021_Databases_Collections_Documents/ppt/Lesson_021_Databases_Collections_and_Documents_Diagram_Text.pptx
+++ b/Section_03_Data_Modeling_Schema_Design_Validation/Lesson_021_Databases_Collections_Documents/ppt/Lesson_021_Databases_Collections_and_Documents_Diagram_Text.pptx
@@ -5,18 +5,18 @@
     <p:sldMasterId id="2147483648" r:id="rId1"/>
   </p:sldMasterIdLst>
   <p:sldIdLst>
-    <p:sldId id="256" r:id="rId7"/>
-    <p:sldId id="257" r:id="rId8"/>
-    <p:sldId id="258" r:id="rId9"/>
-    <p:sldId id="259" r:id="rId10"/>
-    <p:sldId id="260" r:id="rId11"/>
-    <p:sldId id="261" r:id="rId12"/>
-    <p:sldId id="262" r:id="rId13"/>
-    <p:sldId id="263" r:id="rId14"/>
-    <p:sldId id="264" r:id="rId15"/>
-    <p:sldId id="265" r:id="rId16"/>
+    <p:sldId id="256" r:id="rId2"/>
+    <p:sldId id="257" r:id="rId3"/>
+    <p:sldId id="258" r:id="rId4"/>
+    <p:sldId id="259" r:id="rId5"/>
+    <p:sldId id="260" r:id="rId6"/>
+    <p:sldId id="261" r:id="rId7"/>
+    <p:sldId id="262" r:id="rId8"/>
+    <p:sldId id="263" r:id="rId9"/>
+    <p:sldId id="264" r:id="rId10"/>
+    <p:sldId id="265" r:id="rId11"/>
   </p:sldIdLst>
-  <p:sldSz cx="12191695" cy="6858000" type="screen4x3"/>
+  <p:sldSz cx="12192000" cy="6858000"/>
   <p:notesSz cx="6858000" cy="9144000"/>
   <p:defaultTextStyle>
     <a:defPPr>
@@ -113,6 +113,22 @@
       </a:defRPr>
     </a:lvl9pPr>
   </p:defaultTextStyle>
+  <p:extLst>
+    <p:ext uri="{EFAFB233-063F-42B5-8137-9DF3F51BA10A}">
+      <p15:sldGuideLst xmlns:p15="http://schemas.microsoft.com/office/powerpoint/2012/main">
+        <p15:guide id="1" orient="horz" pos="2160">
+          <p15:clr>
+            <a:srgbClr val="A4A3A4"/>
+          </p15:clr>
+        </p15:guide>
+        <p15:guide id="2" pos="2880">
+          <p15:clr>
+            <a:srgbClr val="A4A3A4"/>
+          </p15:clr>
+        </p15:guide>
+      </p15:sldGuideLst>
+    </p:ext>
+  </p:extLst>
 </p:presentation>
 </file>
 
@@ -154,10 +170,9 @@
           <a:lstStyle/>
           <a:p>
             <a:r>
-              <a:rPr lang="en-US" smtClean="0"/>
+              <a:rPr lang="en-US"/>
               <a:t>Click to edit Master title style</a:t>
             </a:r>
-            <a:endParaRPr lang="en-US"/>
           </a:p>
         </p:txBody>
       </p:sp>
@@ -273,10 +288,9 @@
           </a:lstStyle>
           <a:p>
             <a:r>
-              <a:rPr lang="en-US" smtClean="0"/>
+              <a:rPr lang="en-US"/>
               <a:t>Click to edit Master subtitle style</a:t>
             </a:r>
-            <a:endParaRPr lang="en-US"/>
           </a:p>
         </p:txBody>
       </p:sp>
@@ -297,7 +311,7 @@
           <a:p>
             <a:fld id="{5BCAD085-E8A6-8845-BD4E-CB4CCA059FC4}" type="datetimeFigureOut">
               <a:rPr lang="en-US" smtClean="0"/>
-              <a:t>1/27/13</a:t>
+              <a:t>9/28/2026</a:t>
             </a:fld>
             <a:endParaRPr lang="en-US"/>
           </a:p>
@@ -391,10 +405,9 @@
           <a:lstStyle/>
           <a:p>
             <a:r>
-              <a:rPr lang="en-US" smtClean="0"/>
+              <a:rPr lang="en-US"/>
               <a:t>Click to edit Master title style</a:t>
             </a:r>
-            <a:endParaRPr lang="en-US"/>
           </a:p>
         </p:txBody>
       </p:sp>
@@ -415,38 +428,37 @@
           <a:p>
             <a:pPr lvl="0"/>
             <a:r>
-              <a:rPr lang="en-US" smtClean="0"/>
+              <a:rPr lang="en-US"/>
               <a:t>Click to edit Master text styles</a:t>
             </a:r>
           </a:p>
           <a:p>
             <a:pPr lvl="1"/>
             <a:r>
-              <a:rPr lang="en-US" smtClean="0"/>
+              <a:rPr lang="en-US"/>
               <a:t>Second level</a:t>
             </a:r>
           </a:p>
           <a:p>
             <a:pPr lvl="2"/>
             <a:r>
-              <a:rPr lang="en-US" smtClean="0"/>
+              <a:rPr lang="en-US"/>
               <a:t>Third level</a:t>
             </a:r>
           </a:p>
           <a:p>
             <a:pPr lvl="3"/>
             <a:r>
-              <a:rPr lang="en-US" smtClean="0"/>
+              <a:rPr lang="en-US"/>
               <a:t>Fourth level</a:t>
             </a:r>
           </a:p>
           <a:p>
             <a:pPr lvl="4"/>
             <a:r>
-              <a:rPr lang="en-US" smtClean="0"/>
+              <a:rPr lang="en-US"/>
               <a:t>Fifth level</a:t>
             </a:r>
-            <a:endParaRPr lang="en-US"/>
           </a:p>
         </p:txBody>
       </p:sp>
@@ -467,7 +479,7 @@
           <a:p>
             <a:fld id="{5BCAD085-E8A6-8845-BD4E-CB4CCA059FC4}" type="datetimeFigureOut">
               <a:rPr lang="en-US" smtClean="0"/>
-              <a:t>1/27/13</a:t>
+              <a:t>9/28/2026</a:t>
             </a:fld>
             <a:endParaRPr lang="en-US"/>
           </a:p>
@@ -566,10 +578,9 @@
           <a:lstStyle/>
           <a:p>
             <a:r>
-              <a:rPr lang="en-US" smtClean="0"/>
+              <a:rPr lang="en-US"/>
               <a:t>Click to edit Master title style</a:t>
             </a:r>
-            <a:endParaRPr lang="en-US"/>
           </a:p>
         </p:txBody>
       </p:sp>
@@ -595,38 +606,37 @@
           <a:p>
             <a:pPr lvl="0"/>
             <a:r>
-              <a:rPr lang="en-US" smtClean="0"/>
+              <a:rPr lang="en-US"/>
               <a:t>Click to edit Master text styles</a:t>
             </a:r>
           </a:p>
           <a:p>
             <a:pPr lvl="1"/>
             <a:r>
-              <a:rPr lang="en-US" smtClean="0"/>
+              <a:rPr lang="en-US"/>
               <a:t>Second level</a:t>
             </a:r>
           </a:p>
           <a:p>
             <a:pPr lvl="2"/>
             <a:r>
-              <a:rPr lang="en-US" smtClean="0"/>
+              <a:rPr lang="en-US"/>
               <a:t>Third level</a:t>
             </a:r>
           </a:p>
           <a:p>
             <a:pPr lvl="3"/>
             <a:r>
-              <a:rPr lang="en-US" smtClean="0"/>
+              <a:rPr lang="en-US"/>
               <a:t>Fourth level</a:t>
             </a:r>
           </a:p>
           <a:p>
             <a:pPr lvl="4"/>
             <a:r>
-              <a:rPr lang="en-US" smtClean="0"/>
+              <a:rPr lang="en-US"/>
               <a:t>Fifth level</a:t>
             </a:r>
-            <a:endParaRPr lang="en-US"/>
           </a:p>
         </p:txBody>
       </p:sp>
@@ -647,7 +657,7 @@
           <a:p>
             <a:fld id="{5BCAD085-E8A6-8845-BD4E-CB4CCA059FC4}" type="datetimeFigureOut">
               <a:rPr lang="en-US" smtClean="0"/>
-              <a:t>1/27/13</a:t>
+              <a:t>9/28/2026</a:t>
             </a:fld>
             <a:endParaRPr lang="en-US"/>
           </a:p>
@@ -741,10 +751,9 @@
           <a:lstStyle/>
           <a:p>
             <a:r>
-              <a:rPr lang="en-US" smtClean="0"/>
+              <a:rPr lang="en-US"/>
               <a:t>Click to edit Master title style</a:t>
             </a:r>
-            <a:endParaRPr lang="en-US"/>
           </a:p>
         </p:txBody>
       </p:sp>
@@ -765,38 +774,37 @@
           <a:p>
             <a:pPr lvl="0"/>
             <a:r>
-              <a:rPr lang="en-US" smtClean="0"/>
+              <a:rPr lang="en-US"/>
               <a:t>Click to edit Master text styles</a:t>
             </a:r>
           </a:p>
           <a:p>
             <a:pPr lvl="1"/>
             <a:r>
-              <a:rPr lang="en-US" smtClean="0"/>
+              <a:rPr lang="en-US"/>
               <a:t>Second level</a:t>
             </a:r>
           </a:p>
           <a:p>
             <a:pPr lvl="2"/>
             <a:r>
-              <a:rPr lang="en-US" smtClean="0"/>
+              <a:rPr lang="en-US"/>
               <a:t>Third level</a:t>
             </a:r>
           </a:p>
           <a:p>
             <a:pPr lvl="3"/>
             <a:r>
-              <a:rPr lang="en-US" smtClean="0"/>
+              <a:rPr lang="en-US"/>
               <a:t>Fourth level</a:t>
             </a:r>
           </a:p>
           <a:p>
             <a:pPr lvl="4"/>
             <a:r>
-              <a:rPr lang="en-US" smtClean="0"/>
+              <a:rPr lang="en-US"/>
               <a:t>Fifth level</a:t>
             </a:r>
-            <a:endParaRPr lang="en-US"/>
           </a:p>
         </p:txBody>
       </p:sp>
@@ -817,7 +825,7 @@
           <a:p>
             <a:fld id="{5BCAD085-E8A6-8845-BD4E-CB4CCA059FC4}" type="datetimeFigureOut">
               <a:rPr lang="en-US" smtClean="0"/>
-              <a:t>1/27/13</a:t>
+              <a:t>9/28/2026</a:t>
             </a:fld>
             <a:endParaRPr lang="en-US"/>
           </a:p>
@@ -920,10 +928,9 @@
           </a:lstStyle>
           <a:p>
             <a:r>
-              <a:rPr lang="en-US" smtClean="0"/>
+              <a:rPr lang="en-US"/>
               <a:t>Click to edit Master title style</a:t>
             </a:r>
-            <a:endParaRPr lang="en-US"/>
           </a:p>
         </p:txBody>
       </p:sp>
@@ -1040,7 +1047,7 @@
           <a:p>
             <a:pPr lvl="0"/>
             <a:r>
-              <a:rPr lang="en-US" smtClean="0"/>
+              <a:rPr lang="en-US"/>
               <a:t>Click to edit Master text styles</a:t>
             </a:r>
           </a:p>
@@ -1063,7 +1070,7 @@
           <a:p>
             <a:fld id="{5BCAD085-E8A6-8845-BD4E-CB4CCA059FC4}" type="datetimeFigureOut">
               <a:rPr lang="en-US" smtClean="0"/>
-              <a:t>1/27/13</a:t>
+              <a:t>9/28/2026</a:t>
             </a:fld>
             <a:endParaRPr lang="en-US"/>
           </a:p>
@@ -1157,10 +1164,9 @@
           <a:lstStyle/>
           <a:p>
             <a:r>
-              <a:rPr lang="en-US" smtClean="0"/>
+              <a:rPr lang="en-US"/>
               <a:t>Click to edit Master title style</a:t>
             </a:r>
-            <a:endParaRPr lang="en-US"/>
           </a:p>
         </p:txBody>
       </p:sp>
@@ -1214,38 +1220,37 @@
           <a:p>
             <a:pPr lvl="0"/>
             <a:r>
-              <a:rPr lang="en-US" smtClean="0"/>
+              <a:rPr lang="en-US"/>
               <a:t>Click to edit Master text styles</a:t>
             </a:r>
           </a:p>
           <a:p>
             <a:pPr lvl="1"/>
             <a:r>
-              <a:rPr lang="en-US" smtClean="0"/>
+              <a:rPr lang="en-US"/>
               <a:t>Second level</a:t>
             </a:r>
           </a:p>
           <a:p>
             <a:pPr lvl="2"/>
             <a:r>
-              <a:rPr lang="en-US" smtClean="0"/>
+              <a:rPr lang="en-US"/>
               <a:t>Third level</a:t>
             </a:r>
           </a:p>
           <a:p>
             <a:pPr lvl="3"/>
             <a:r>
-              <a:rPr lang="en-US" smtClean="0"/>
+              <a:rPr lang="en-US"/>
               <a:t>Fourth level</a:t>
             </a:r>
           </a:p>
           <a:p>
             <a:pPr lvl="4"/>
             <a:r>
-              <a:rPr lang="en-US" smtClean="0"/>
+              <a:rPr lang="en-US"/>
               <a:t>Fifth level</a:t>
             </a:r>
-            <a:endParaRPr lang="en-US"/>
           </a:p>
         </p:txBody>
       </p:sp>
@@ -1299,38 +1304,37 @@
           <a:p>
             <a:pPr lvl="0"/>
             <a:r>
-              <a:rPr lang="en-US" smtClean="0"/>
+              <a:rPr lang="en-US"/>
               <a:t>Click to edit Master text styles</a:t>
             </a:r>
           </a:p>
           <a:p>
             <a:pPr lvl="1"/>
             <a:r>
-              <a:rPr lang="en-US" smtClean="0"/>
+              <a:rPr lang="en-US"/>
               <a:t>Second level</a:t>
             </a:r>
           </a:p>
           <a:p>
             <a:pPr lvl="2"/>
             <a:r>
-              <a:rPr lang="en-US" smtClean="0"/>
+              <a:rPr lang="en-US"/>
               <a:t>Third level</a:t>
             </a:r>
           </a:p>
           <a:p>
             <a:pPr lvl="3"/>
             <a:r>
-              <a:rPr lang="en-US" smtClean="0"/>
+              <a:rPr lang="en-US"/>
               <a:t>Fourth level</a:t>
             </a:r>
           </a:p>
           <a:p>
             <a:pPr lvl="4"/>
             <a:r>
-              <a:rPr lang="en-US" smtClean="0"/>
+              <a:rPr lang="en-US"/>
               <a:t>Fifth level</a:t>
             </a:r>
-            <a:endParaRPr lang="en-US"/>
           </a:p>
         </p:txBody>
       </p:sp>
@@ -1351,7 +1355,7 @@
           <a:p>
             <a:fld id="{5BCAD085-E8A6-8845-BD4E-CB4CCA059FC4}" type="datetimeFigureOut">
               <a:rPr lang="en-US" smtClean="0"/>
-              <a:t>1/27/13</a:t>
+              <a:t>9/28/2026</a:t>
             </a:fld>
             <a:endParaRPr lang="en-US"/>
           </a:p>
@@ -1449,10 +1453,9 @@
           </a:lstStyle>
           <a:p>
             <a:r>
-              <a:rPr lang="en-US" smtClean="0"/>
+              <a:rPr lang="en-US"/>
               <a:t>Click to edit Master title style</a:t>
             </a:r>
-            <a:endParaRPr lang="en-US"/>
           </a:p>
         </p:txBody>
       </p:sp>
@@ -1515,7 +1518,7 @@
           <a:p>
             <a:pPr lvl="0"/>
             <a:r>
-              <a:rPr lang="en-US" smtClean="0"/>
+              <a:rPr lang="en-US"/>
               <a:t>Click to edit Master text styles</a:t>
             </a:r>
           </a:p>
@@ -1571,38 +1574,37 @@
           <a:p>
             <a:pPr lvl="0"/>
             <a:r>
-              <a:rPr lang="en-US" smtClean="0"/>
+              <a:rPr lang="en-US"/>
               <a:t>Click to edit Master text styles</a:t>
             </a:r>
           </a:p>
           <a:p>
             <a:pPr lvl="1"/>
             <a:r>
-              <a:rPr lang="en-US" smtClean="0"/>
+              <a:rPr lang="en-US"/>
               <a:t>Second level</a:t>
             </a:r>
           </a:p>
           <a:p>
             <a:pPr lvl="2"/>
             <a:r>
-              <a:rPr lang="en-US" smtClean="0"/>
+              <a:rPr lang="en-US"/>
               <a:t>Third level</a:t>
             </a:r>
           </a:p>
           <a:p>
             <a:pPr lvl="3"/>
             <a:r>
-              <a:rPr lang="en-US" smtClean="0"/>
+              <a:rPr lang="en-US"/>
               <a:t>Fourth level</a:t>
             </a:r>
           </a:p>
           <a:p>
             <a:pPr lvl="4"/>
             <a:r>
-              <a:rPr lang="en-US" smtClean="0"/>
+              <a:rPr lang="en-US"/>
               <a:t>Fifth level</a:t>
             </a:r>
-            <a:endParaRPr lang="en-US"/>
           </a:p>
         </p:txBody>
       </p:sp>
@@ -1665,7 +1667,7 @@
           <a:p>
             <a:pPr lvl="0"/>
             <a:r>
-              <a:rPr lang="en-US" smtClean="0"/>
+              <a:rPr lang="en-US"/>
               <a:t>Click to edit Master text styles</a:t>
             </a:r>
           </a:p>
@@ -1721,38 +1723,37 @@
           <a:p>
             <a:pPr lvl="0"/>
             <a:r>
-              <a:rPr lang="en-US" smtClean="0"/>
+              <a:rPr lang="en-US"/>
               <a:t>Click to edit Master text styles</a:t>
             </a:r>
           </a:p>
           <a:p>
             <a:pPr lvl="1"/>
             <a:r>
-              <a:rPr lang="en-US" smtClean="0"/>
+              <a:rPr lang="en-US"/>
               <a:t>Second level</a:t>
             </a:r>
           </a:p>
           <a:p>
             <a:pPr lvl="2"/>
             <a:r>
-              <a:rPr lang="en-US" smtClean="0"/>
+              <a:rPr lang="en-US"/>
               <a:t>Third level</a:t>
             </a:r>
           </a:p>
           <a:p>
             <a:pPr lvl="3"/>
             <a:r>
-              <a:rPr lang="en-US" smtClean="0"/>
+              <a:rPr lang="en-US"/>
               <a:t>Fourth level</a:t>
             </a:r>
           </a:p>
           <a:p>
             <a:pPr lvl="4"/>
             <a:r>
-              <a:rPr lang="en-US" smtClean="0"/>
+              <a:rPr lang="en-US"/>
               <a:t>Fifth level</a:t>
             </a:r>
-            <a:endParaRPr lang="en-US"/>
           </a:p>
         </p:txBody>
       </p:sp>
@@ -1773,7 +1774,7 @@
           <a:p>
             <a:fld id="{5BCAD085-E8A6-8845-BD4E-CB4CCA059FC4}" type="datetimeFigureOut">
               <a:rPr lang="en-US" smtClean="0"/>
-              <a:t>1/27/13</a:t>
+              <a:t>9/28/2026</a:t>
             </a:fld>
             <a:endParaRPr lang="en-US"/>
           </a:p>
@@ -1867,10 +1868,9 @@
           <a:lstStyle/>
           <a:p>
             <a:r>
-              <a:rPr lang="en-US" smtClean="0"/>
+              <a:rPr lang="en-US"/>
               <a:t>Click to edit Master title style</a:t>
             </a:r>
-            <a:endParaRPr lang="en-US"/>
           </a:p>
         </p:txBody>
       </p:sp>
@@ -1891,7 +1891,7 @@
           <a:p>
             <a:fld id="{5BCAD085-E8A6-8845-BD4E-CB4CCA059FC4}" type="datetimeFigureOut">
               <a:rPr lang="en-US" smtClean="0"/>
-              <a:t>1/27/13</a:t>
+              <a:t>9/28/2026</a:t>
             </a:fld>
             <a:endParaRPr lang="en-US"/>
           </a:p>
@@ -1986,7 +1986,7 @@
           <a:p>
             <a:fld id="{5BCAD085-E8A6-8845-BD4E-CB4CCA059FC4}" type="datetimeFigureOut">
               <a:rPr lang="en-US" smtClean="0"/>
-              <a:t>1/27/13</a:t>
+              <a:t>9/28/2026</a:t>
             </a:fld>
             <a:endParaRPr lang="en-US"/>
           </a:p>
@@ -2089,10 +2089,9 @@
           </a:lstStyle>
           <a:p>
             <a:r>
-              <a:rPr lang="en-US" smtClean="0"/>
+              <a:rPr lang="en-US"/>
               <a:t>Click to edit Master title style</a:t>
             </a:r>
-            <a:endParaRPr lang="en-US"/>
           </a:p>
         </p:txBody>
       </p:sp>
@@ -2146,38 +2145,37 @@
           <a:p>
             <a:pPr lvl="0"/>
             <a:r>
-              <a:rPr lang="en-US" smtClean="0"/>
+              <a:rPr lang="en-US"/>
               <a:t>Click to edit Master text styles</a:t>
             </a:r>
           </a:p>
           <a:p>
             <a:pPr lvl="1"/>
             <a:r>
-              <a:rPr lang="en-US" smtClean="0"/>
+              <a:rPr lang="en-US"/>
               <a:t>Second level</a:t>
             </a:r>
           </a:p>
           <a:p>
             <a:pPr lvl="2"/>
             <a:r>
-              <a:rPr lang="en-US" smtClean="0"/>
+              <a:rPr lang="en-US"/>
               <a:t>Third level</a:t>
             </a:r>
           </a:p>
           <a:p>
             <a:pPr lvl="3"/>
             <a:r>
-              <a:rPr lang="en-US" smtClean="0"/>
+              <a:rPr lang="en-US"/>
               <a:t>Fourth level</a:t>
             </a:r>
           </a:p>
           <a:p>
             <a:pPr lvl="4"/>
             <a:r>
-              <a:rPr lang="en-US" smtClean="0"/>
+              <a:rPr lang="en-US"/>
               <a:t>Fifth level</a:t>
             </a:r>
-            <a:endParaRPr lang="en-US"/>
           </a:p>
         </p:txBody>
       </p:sp>
@@ -2240,7 +2238,7 @@
           <a:p>
             <a:pPr lvl="0"/>
             <a:r>
-              <a:rPr lang="en-US" smtClean="0"/>
+              <a:rPr lang="en-US"/>
               <a:t>Click to edit Master text styles</a:t>
             </a:r>
           </a:p>
@@ -2263,7 +2261,7 @@
           <a:p>
             <a:fld id="{5BCAD085-E8A6-8845-BD4E-CB4CCA059FC4}" type="datetimeFigureOut">
               <a:rPr lang="en-US" smtClean="0"/>
-              <a:t>1/27/13</a:t>
+              <a:t>9/28/2026</a:t>
             </a:fld>
             <a:endParaRPr lang="en-US"/>
           </a:p>
@@ -2366,10 +2364,9 @@
           </a:lstStyle>
           <a:p>
             <a:r>
-              <a:rPr lang="en-US" smtClean="0"/>
+              <a:rPr lang="en-US"/>
               <a:t>Click to edit Master title style</a:t>
             </a:r>
-            <a:endParaRPr lang="en-US"/>
           </a:p>
         </p:txBody>
       </p:sp>
@@ -2493,7 +2490,7 @@
           <a:p>
             <a:pPr lvl="0"/>
             <a:r>
-              <a:rPr lang="en-US" smtClean="0"/>
+              <a:rPr lang="en-US"/>
               <a:t>Click to edit Master text styles</a:t>
             </a:r>
           </a:p>
@@ -2516,7 +2513,7 @@
           <a:p>
             <a:fld id="{5BCAD085-E8A6-8845-BD4E-CB4CCA059FC4}" type="datetimeFigureOut">
               <a:rPr lang="en-US" smtClean="0"/>
-              <a:t>1/27/13</a:t>
+              <a:t>9/28/2026</a:t>
             </a:fld>
             <a:endParaRPr lang="en-US"/>
           </a:p>
@@ -2625,10 +2622,9 @@
           <a:lstStyle/>
           <a:p>
             <a:r>
-              <a:rPr lang="en-US" smtClean="0"/>
+              <a:rPr lang="en-US"/>
               <a:t>Click to edit Master title style</a:t>
             </a:r>
-            <a:endParaRPr lang="en-US"/>
           </a:p>
         </p:txBody>
       </p:sp>
@@ -2659,38 +2655,37 @@
           <a:p>
             <a:pPr lvl="0"/>
             <a:r>
-              <a:rPr lang="en-US" smtClean="0"/>
+              <a:rPr lang="en-US"/>
               <a:t>Click to edit Master text styles</a:t>
             </a:r>
           </a:p>
           <a:p>
             <a:pPr lvl="1"/>
             <a:r>
-              <a:rPr lang="en-US" smtClean="0"/>
+              <a:rPr lang="en-US"/>
               <a:t>Second level</a:t>
             </a:r>
           </a:p>
           <a:p>
             <a:pPr lvl="2"/>
             <a:r>
-              <a:rPr lang="en-US" smtClean="0"/>
+              <a:rPr lang="en-US"/>
               <a:t>Third level</a:t>
             </a:r>
           </a:p>
           <a:p>
             <a:pPr lvl="3"/>
             <a:r>
-              <a:rPr lang="en-US" smtClean="0"/>
+              <a:rPr lang="en-US"/>
               <a:t>Fourth level</a:t>
             </a:r>
           </a:p>
           <a:p>
             <a:pPr lvl="4"/>
             <a:r>
-              <a:rPr lang="en-US" smtClean="0"/>
+              <a:rPr lang="en-US"/>
               <a:t>Fifth level</a:t>
             </a:r>
-            <a:endParaRPr lang="en-US"/>
           </a:p>
         </p:txBody>
       </p:sp>
@@ -2729,7 +2724,7 @@
           <a:p>
             <a:fld id="{5BCAD085-E8A6-8845-BD4E-CB4CCA059FC4}" type="datetimeFigureOut">
               <a:rPr lang="en-US" smtClean="0"/>
-              <a:t>1/27/13</a:t>
+              <a:t>9/28/2026</a:t>
             </a:fld>
             <a:endParaRPr lang="en-US"/>
           </a:p>
@@ -3088,7 +3083,7 @@
 </file>
 
 <file path=ppt/slides/slide1.xml><?xml version="1.0" encoding="utf-8"?>
-<p:sld xmlns:a="http://schemas.openxmlformats.org/drawingml/2006/main" xmlns:p="http://schemas.openxmlformats.org/presentationml/2006/main" xmlns:r="http://schemas.openxmlformats.org/officeDocument/2006/relationships">
+<p:sld xmlns:a="http://schemas.openxmlformats.org/drawingml/2006/main" xmlns:r="http://schemas.openxmlformats.org/officeDocument/2006/relationships" xmlns:p="http://schemas.openxmlformats.org/presentationml/2006/main">
   <p:cSld>
     <p:bg>
       <p:bgPr>
@@ -3104,7 +3099,14 @@
         <p:cNvGrpSpPr/>
         <p:nvPr/>
       </p:nvGrpSpPr>
-      <p:grpSpPr/>
+      <p:grpSpPr>
+        <a:xfrm>
+          <a:off x="0" y="0"/>
+          <a:ext cx="0" cy="0"/>
+          <a:chOff x="0" y="0"/>
+          <a:chExt cx="0" cy="0"/>
+        </a:xfrm>
+      </p:grpSpPr>
       <p:sp>
         <p:nvSpPr>
           <p:cNvPr id="2" name="Rectangle 1"/>
@@ -3145,6 +3147,7 @@
           <a:lstStyle/>
           <a:p>
             <a:pPr algn="ctr"/>
+            <a:endParaRPr/>
           </a:p>
         </p:txBody>
       </p:sp>
@@ -3157,7 +3160,7 @@
         <p:spPr>
           <a:xfrm>
             <a:off x="777240" y="384048"/>
-            <a:ext cx="10789920" cy="777240"/>
+            <a:ext cx="8174097" cy="646331"/>
           </a:xfrm>
           <a:prstGeom prst="rect">
             <a:avLst/>
@@ -3179,7 +3182,8 @@
               </a:defRPr>
             </a:pPr>
             <a:r>
-              <a:t>Lesson 021 — Databases, Collections and Documents</a:t>
+              <a:rPr dirty="0"/>
+              <a:t>Databases, Collections and Documents</a:t>
             </a:r>
           </a:p>
         </p:txBody>
@@ -3590,7 +3594,7 @@
 </file>
 
 <file path=ppt/slides/slide10.xml><?xml version="1.0" encoding="utf-8"?>
-<p:sld xmlns:a="http://schemas.openxmlformats.org/drawingml/2006/main" xmlns:p="http://schemas.openxmlformats.org/presentationml/2006/main" xmlns:r="http://schemas.openxmlformats.org/officeDocument/2006/relationships">
+<p:sld xmlns:a="http://schemas.openxmlformats.org/drawingml/2006/main" xmlns:r="http://schemas.openxmlformats.org/officeDocument/2006/relationships" xmlns:p="http://schemas.openxmlformats.org/presentationml/2006/main">
   <p:cSld>
     <p:bg>
       <p:bgPr>
@@ -3606,7 +3610,14 @@
         <p:cNvGrpSpPr/>
         <p:nvPr/>
       </p:nvGrpSpPr>
-      <p:grpSpPr/>
+      <p:grpSpPr>
+        <a:xfrm>
+          <a:off x="0" y="0"/>
+          <a:ext cx="0" cy="0"/>
+          <a:chOff x="0" y="0"/>
+          <a:chExt cx="0" cy="0"/>
+        </a:xfrm>
+      </p:grpSpPr>
       <p:sp>
         <p:nvSpPr>
           <p:cNvPr id="2" name="Rectangle 1"/>
@@ -3647,6 +3658,7 @@
           <a:lstStyle/>
           <a:p>
             <a:pPr algn="ctr"/>
+            <a:endParaRPr/>
           </a:p>
         </p:txBody>
       </p:sp>
@@ -3659,7 +3671,7 @@
         <p:spPr>
           <a:xfrm>
             <a:off x="777240" y="384048"/>
-            <a:ext cx="10789920" cy="777240"/>
+            <a:ext cx="3217932" cy="646331"/>
           </a:xfrm>
           <a:prstGeom prst="rect">
             <a:avLst/>
@@ -3681,7 +3693,7 @@
               </a:defRPr>
             </a:pPr>
             <a:r>
-              <a:t>Lesson 021 — Key Takeaways</a:t>
+              <a:t> Key Takeaways</a:t>
             </a:r>
           </a:p>
         </p:txBody>
@@ -4112,7 +4124,7 @@
 </file>
 
 <file path=ppt/slides/slide2.xml><?xml version="1.0" encoding="utf-8"?>
-<p:sld xmlns:a="http://schemas.openxmlformats.org/drawingml/2006/main" xmlns:p="http://schemas.openxmlformats.org/presentationml/2006/main" xmlns:r="http://schemas.openxmlformats.org/officeDocument/2006/relationships">
+<p:sld xmlns:a="http://schemas.openxmlformats.org/drawingml/2006/main" xmlns:r="http://schemas.openxmlformats.org/officeDocument/2006/relationships" xmlns:p="http://schemas.openxmlformats.org/presentationml/2006/main">
   <p:cSld>
     <p:bg>
       <p:bgPr>
@@ -4128,7 +4140,14 @@
         <p:cNvGrpSpPr/>
         <p:nvPr/>
       </p:nvGrpSpPr>
-      <p:grpSpPr/>
+      <p:grpSpPr>
+        <a:xfrm>
+          <a:off x="0" y="0"/>
+          <a:ext cx="0" cy="0"/>
+          <a:chOff x="0" y="0"/>
+          <a:chExt cx="0" cy="0"/>
+        </a:xfrm>
+      </p:grpSpPr>
       <p:sp>
         <p:nvSpPr>
           <p:cNvPr id="2" name="Rectangle 1"/>
@@ -4169,6 +4188,7 @@
           <a:lstStyle/>
           <a:p>
             <a:pPr algn="ctr"/>
+            <a:endParaRPr/>
           </a:p>
         </p:txBody>
       </p:sp>
@@ -4629,7 +4649,7 @@
 </file>
 
 <file path=ppt/slides/slide3.xml><?xml version="1.0" encoding="utf-8"?>
-<p:sld xmlns:a="http://schemas.openxmlformats.org/drawingml/2006/main" xmlns:p="http://schemas.openxmlformats.org/presentationml/2006/main" xmlns:r="http://schemas.openxmlformats.org/officeDocument/2006/relationships">
+<p:sld xmlns:a="http://schemas.openxmlformats.org/drawingml/2006/main" xmlns:r="http://schemas.openxmlformats.org/officeDocument/2006/relationships" xmlns:p="http://schemas.openxmlformats.org/presentationml/2006/main">
   <p:cSld>
     <p:bg>
       <p:bgPr>
@@ -4645,7 +4665,14 @@
         <p:cNvGrpSpPr/>
         <p:nvPr/>
       </p:nvGrpSpPr>
-      <p:grpSpPr/>
+      <p:grpSpPr>
+        <a:xfrm>
+          <a:off x="0" y="0"/>
+          <a:ext cx="0" cy="0"/>
+          <a:chOff x="0" y="0"/>
+          <a:chExt cx="0" cy="0"/>
+        </a:xfrm>
+      </p:grpSpPr>
       <p:sp>
         <p:nvSpPr>
           <p:cNvPr id="2" name="Rectangle 1"/>
@@ -4686,6 +4713,7 @@
           <a:lstStyle/>
           <a:p>
             <a:pPr algn="ctr"/>
+            <a:endParaRPr/>
           </a:p>
         </p:txBody>
       </p:sp>
@@ -5236,7 +5264,7 @@
 </file>
 
 <file path=ppt/slides/slide4.xml><?xml version="1.0" encoding="utf-8"?>
-<p:sld xmlns:a="http://schemas.openxmlformats.org/drawingml/2006/main" xmlns:p="http://schemas.openxmlformats.org/presentationml/2006/main" xmlns:r="http://schemas.openxmlformats.org/officeDocument/2006/relationships">
+<p:sld xmlns:a="http://schemas.openxmlformats.org/drawingml/2006/main" xmlns:r="http://schemas.openxmlformats.org/officeDocument/2006/relationships" xmlns:p="http://schemas.openxmlformats.org/presentationml/2006/main">
   <p:cSld>
     <p:bg>
       <p:bgPr>
@@ -5252,7 +5280,14 @@
         <p:cNvGrpSpPr/>
         <p:nvPr/>
       </p:nvGrpSpPr>
-      <p:grpSpPr/>
+      <p:grpSpPr>
+        <a:xfrm>
+          <a:off x="0" y="0"/>
+          <a:ext cx="0" cy="0"/>
+          <a:chOff x="0" y="0"/>
+          <a:chExt cx="0" cy="0"/>
+        </a:xfrm>
+      </p:grpSpPr>
       <p:sp>
         <p:nvSpPr>
           <p:cNvPr id="2" name="Rectangle 1"/>
@@ -5293,6 +5328,7 @@
           <a:lstStyle/>
           <a:p>
             <a:pPr algn="ctr"/>
+            <a:endParaRPr/>
           </a:p>
         </p:txBody>
       </p:sp>
@@ -5515,7 +5551,7 @@
 </file>
 
 <file path=ppt/slides/slide5.xml><?xml version="1.0" encoding="utf-8"?>
-<p:sld xmlns:a="http://schemas.openxmlformats.org/drawingml/2006/main" xmlns:p="http://schemas.openxmlformats.org/presentationml/2006/main" xmlns:r="http://schemas.openxmlformats.org/officeDocument/2006/relationships">
+<p:sld xmlns:a="http://schemas.openxmlformats.org/drawingml/2006/main" xmlns:r="http://schemas.openxmlformats.org/officeDocument/2006/relationships" xmlns:p="http://schemas.openxmlformats.org/presentationml/2006/main">
   <p:cSld>
     <p:bg>
       <p:bgPr>
@@ -5531,7 +5567,14 @@
         <p:cNvGrpSpPr/>
         <p:nvPr/>
       </p:nvGrpSpPr>
-      <p:grpSpPr/>
+      <p:grpSpPr>
+        <a:xfrm>
+          <a:off x="0" y="0"/>
+          <a:ext cx="0" cy="0"/>
+          <a:chOff x="0" y="0"/>
+          <a:chExt cx="0" cy="0"/>
+        </a:xfrm>
+      </p:grpSpPr>
       <p:sp>
         <p:nvSpPr>
           <p:cNvPr id="2" name="Rectangle 1"/>
@@ -5572,6 +5615,7 @@
           <a:lstStyle/>
           <a:p>
             <a:pPr algn="ctr"/>
+            <a:endParaRPr/>
           </a:p>
         </p:txBody>
       </p:sp>
@@ -6122,7 +6166,7 @@
 </file>
 
 <file path=ppt/slides/slide6.xml><?xml version="1.0" encoding="utf-8"?>
-<p:sld xmlns:a="http://schemas.openxmlformats.org/drawingml/2006/main" xmlns:p="http://schemas.openxmlformats.org/presentationml/2006/main" xmlns:r="http://schemas.openxmlformats.org/officeDocument/2006/relationships">
+<p:sld xmlns:a="http://schemas.openxmlformats.org/drawingml/2006/main" xmlns:r="http://schemas.openxmlformats.org/officeDocument/2006/relationships" xmlns:p="http://schemas.openxmlformats.org/presentationml/2006/main">
   <p:cSld>
     <p:bg>
       <p:bgPr>
@@ -6138,7 +6182,14 @@
         <p:cNvGrpSpPr/>
         <p:nvPr/>
       </p:nvGrpSpPr>
-      <p:grpSpPr/>
+      <p:grpSpPr>
+        <a:xfrm>
+          <a:off x="0" y="0"/>
+          <a:ext cx="0" cy="0"/>
+          <a:chOff x="0" y="0"/>
+          <a:chExt cx="0" cy="0"/>
+        </a:xfrm>
+      </p:grpSpPr>
       <p:sp>
         <p:nvSpPr>
           <p:cNvPr id="2" name="Rectangle 1"/>
@@ -6179,6 +6230,7 @@
           <a:lstStyle/>
           <a:p>
             <a:pPr algn="ctr"/>
+            <a:endParaRPr/>
           </a:p>
         </p:txBody>
       </p:sp>
@@ -6522,7 +6574,7 @@
 </file>
 
 <file path=ppt/slides/slide7.xml><?xml version="1.0" encoding="utf-8"?>
-<p:sld xmlns:a="http://schemas.openxmlformats.org/drawingml/2006/main" xmlns:p="http://schemas.openxmlformats.org/presentationml/2006/main" xmlns:r="http://schemas.openxmlformats.org/officeDocument/2006/relationships">
+<p:sld xmlns:a="http://schemas.openxmlformats.org/drawingml/2006/main" xmlns:r="http://schemas.openxmlformats.org/officeDocument/2006/relationships" xmlns:p="http://schemas.openxmlformats.org/presentationml/2006/main">
   <p:cSld>
     <p:bg>
       <p:bgPr>
@@ -6538,7 +6590,14 @@
         <p:cNvGrpSpPr/>
         <p:nvPr/>
       </p:nvGrpSpPr>
-      <p:grpSpPr/>
+      <p:grpSpPr>
+        <a:xfrm>
+          <a:off x="0" y="0"/>
+          <a:ext cx="0" cy="0"/>
+          <a:chOff x="0" y="0"/>
+          <a:chExt cx="0" cy="0"/>
+        </a:xfrm>
+      </p:grpSpPr>
       <p:sp>
         <p:nvSpPr>
           <p:cNvPr id="2" name="Rectangle 1"/>
@@ -6579,6 +6638,7 @@
           <a:lstStyle/>
           <a:p>
             <a:pPr algn="ctr"/>
+            <a:endParaRPr/>
           </a:p>
         </p:txBody>
       </p:sp>
@@ -7039,7 +7099,7 @@
 </file>
 
 <file path=ppt/slides/slide8.xml><?xml version="1.0" encoding="utf-8"?>
-<p:sld xmlns:a="http://schemas.openxmlformats.org/drawingml/2006/main" xmlns:p="http://schemas.openxmlformats.org/presentationml/2006/main" xmlns:r="http://schemas.openxmlformats.org/officeDocument/2006/relationships">
+<p:sld xmlns:a="http://schemas.openxmlformats.org/drawingml/2006/main" xmlns:r="http://schemas.openxmlformats.org/officeDocument/2006/relationships" xmlns:p="http://schemas.openxmlformats.org/presentationml/2006/main">
   <p:cSld>
     <p:bg>
       <p:bgPr>
@@ -7055,7 +7115,14 @@
         <p:cNvGrpSpPr/>
         <p:nvPr/>
       </p:nvGrpSpPr>
-      <p:grpSpPr/>
+      <p:grpSpPr>
+        <a:xfrm>
+          <a:off x="0" y="0"/>
+          <a:ext cx="0" cy="0"/>
+          <a:chOff x="0" y="0"/>
+          <a:chExt cx="0" cy="0"/>
+        </a:xfrm>
+      </p:grpSpPr>
       <p:sp>
         <p:nvSpPr>
           <p:cNvPr id="2" name="Rectangle 1"/>
@@ -7096,6 +7163,7 @@
           <a:lstStyle/>
           <a:p>
             <a:pPr algn="ctr"/>
+            <a:endParaRPr/>
           </a:p>
         </p:txBody>
       </p:sp>
@@ -7592,7 +7660,7 @@
 </file>
 
 <file path=ppt/slides/slide9.xml><?xml version="1.0" encoding="utf-8"?>
-<p:sld xmlns:a="http://schemas.openxmlformats.org/drawingml/2006/main" xmlns:p="http://schemas.openxmlformats.org/presentationml/2006/main" xmlns:r="http://schemas.openxmlformats.org/officeDocument/2006/relationships">
+<p:sld xmlns:a="http://schemas.openxmlformats.org/drawingml/2006/main" xmlns:r="http://schemas.openxmlformats.org/officeDocument/2006/relationships" xmlns:p="http://schemas.openxmlformats.org/presentationml/2006/main">
   <p:cSld>
     <p:bg>
       <p:bgPr>
@@ -7608,7 +7676,14 @@
         <p:cNvGrpSpPr/>
         <p:nvPr/>
       </p:nvGrpSpPr>
-      <p:grpSpPr/>
+      <p:grpSpPr>
+        <a:xfrm>
+          <a:off x="0" y="0"/>
+          <a:ext cx="0" cy="0"/>
+          <a:chOff x="0" y="0"/>
+          <a:chExt cx="0" cy="0"/>
+        </a:xfrm>
+      </p:grpSpPr>
       <p:sp>
         <p:nvSpPr>
           <p:cNvPr id="2" name="Rectangle 1"/>
@@ -7649,6 +7724,7 @@
           <a:lstStyle/>
           <a:p>
             <a:pPr algn="ctr"/>
+            <a:endParaRPr/>
           </a:p>
         </p:txBody>
       </p:sp>
@@ -8521,4 +8597,10 @@
   </a:objectDefaults>
   <a:extraClrSchemeLst/>
 </a:theme>
+</file>
+
+<file path=docMetadata/LabelInfo.xml><?xml version="1.0" encoding="utf-8"?>
+<clbl:labelList xmlns:clbl="http://schemas.microsoft.com/office/2020/mipLabelMetadata">
+  <clbl:label id="{2ae551e3-0043-40f0-9a67-12d995049d50}" enabled="1" method="Standard" siteId="{97984c2b-a229-4609-8185-ae84947bc3fc}" contentBits="0" removed="0"/>
+</clbl:labelList>
 </file>